--- a/Presentazione_0386492.pptx
+++ b/Presentazione_0386492.pptx
@@ -22,8 +22,8 @@
     <p:sldId id="268" r:id="rId13"/>
     <p:sldId id="269" r:id="rId14"/>
     <p:sldId id="270" r:id="rId15"/>
-    <p:sldId id="271" r:id="rId16"/>
-    <p:sldId id="272" r:id="rId17"/>
+    <p:sldId id="380" r:id="rId16"/>
+    <p:sldId id="271" r:id="rId17"/>
     <p:sldId id="273" r:id="rId18"/>
     <p:sldId id="274" r:id="rId19"/>
     <p:sldId id="275" r:id="rId20"/>
@@ -11552,7 +11552,7 @@
         <p:spPr>
           <a:xfrm>
             <a:off x="533399" y="728069"/>
-            <a:ext cx="11116884" cy="4539704"/>
+            <a:ext cx="11116884" cy="4878259"/>
           </a:xfrm>
           <a:prstGeom prst="rect">
             <a:avLst/>
@@ -11591,7 +11591,15 @@
             </a:r>
             <a:r>
               <a:rPr lang="it-IT" sz="3200" dirty="0"/>
-              <a:t>a partire da un ciclo di lunghezza dispari (2k+1) non è possibile scegliere più di k vertici senza che ci sia almeno una coppia di vertici adiacenti tra quelli selezionati.</a:t>
+              <a:t>in un grafo G = (V, E), S è una cover solo se V / S è un set indipendente (non ammette coppie di nodi adiacenti). Inoltre, a partire da un ciclo di lunghezza dispari (2k+1) </a:t>
+            </a:r>
+            <a:r>
+              <a:rPr lang="it-IT" sz="3200" b="1" dirty="0"/>
+              <a:t>non è possibile scegliere più di k vertici </a:t>
+            </a:r>
+            <a:r>
+              <a:rPr lang="it-IT" sz="3200" dirty="0"/>
+              <a:t>senza che ci sia almeno una coppia di vertici adiacenti tra quelli selezionati.</a:t>
             </a:r>
             <a:endParaRPr lang="it-IT" sz="3200" b="1" dirty="0"/>
           </a:p>
@@ -11601,23 +11609,22 @@
                 <a:spcPts val="1200"/>
               </a:spcAft>
             </a:pPr>
-            <a:endParaRPr lang="it-IT" sz="3200" dirty="0"/>
-          </a:p>
-          <a:p>
-            <a:pPr algn="just">
-              <a:spcAft>
-                <a:spcPts val="1200"/>
-              </a:spcAft>
-            </a:pPr>
             <a:r>
               <a:rPr lang="it-IT" sz="3200" b="1" dirty="0"/>
-              <a:t>Considerazione: </a:t>
+              <a:t>Osservazione: </a:t>
             </a:r>
             <a:r>
               <a:rPr lang="it-IT" sz="3200" dirty="0"/>
-              <a:t>nel modello di PLI la x[i] relativa al vertice i vale 1 se quel vertice è stato inserito nella cover. Nel modello rilassato la x[i] può assumere valori frazionari.</a:t>
-            </a:r>
-            <a:endParaRPr lang="it-IT" sz="3200" b="1" dirty="0"/>
+              <a:t>da un ciclo di 2k+1 nodi, massimo k possono formare un set indipendente, i restanti </a:t>
+            </a:r>
+            <a:r>
+              <a:rPr lang="it-IT" sz="3200" b="1" dirty="0"/>
+              <a:t>k+1 formeranno una cover</a:t>
+            </a:r>
+            <a:r>
+              <a:rPr lang="it-IT" sz="3200" dirty="0"/>
+              <a:t>.</a:t>
+            </a:r>
           </a:p>
         </p:txBody>
       </p:sp>
@@ -11654,7 +11661,7 @@
         <p:cNvPr id="1" name="">
           <a:extLst>
             <a:ext uri="{FF2B5EF4-FFF2-40B4-BE49-F238E27FC236}">
-              <a16:creationId xmlns:a16="http://schemas.microsoft.com/office/drawing/2014/main" id="{B94DB9C7-C12C-FB9E-BD5B-E6E1F6E72AC8}"/>
+              <a16:creationId xmlns:a16="http://schemas.microsoft.com/office/drawing/2014/main" id="{558996F3-C101-2D62-379C-0FD7DC18DD04}"/>
             </a:ext>
           </a:extLst>
         </p:cNvPr>
@@ -11674,7 +11681,7 @@
           <p:cNvPr id="5" name="Rettangolo 4">
             <a:extLst>
               <a:ext uri="{FF2B5EF4-FFF2-40B4-BE49-F238E27FC236}">
-                <a16:creationId xmlns:a16="http://schemas.microsoft.com/office/drawing/2014/main" id="{80DE0A1C-D9FA-6552-EB65-8DB2236EF185}"/>
+                <a16:creationId xmlns:a16="http://schemas.microsoft.com/office/drawing/2014/main" id="{367B0CEB-3EDC-409A-07B7-AD80FF8674D2}"/>
               </a:ext>
             </a:extLst>
           </p:cNvPr>
@@ -11728,7 +11735,7 @@
           <p:cNvPr id="6" name="CasellaDiTesto 5">
             <a:extLst>
               <a:ext uri="{FF2B5EF4-FFF2-40B4-BE49-F238E27FC236}">
-                <a16:creationId xmlns:a16="http://schemas.microsoft.com/office/drawing/2014/main" id="{069437A2-D929-025B-6C2E-6E6BFA10D4EC}"/>
+                <a16:creationId xmlns:a16="http://schemas.microsoft.com/office/drawing/2014/main" id="{3FF06734-D49F-2B4F-D714-6EB7D9D94C7A}"/>
               </a:ext>
             </a:extLst>
           </p:cNvPr>
@@ -11768,7 +11775,7 @@
           <p:cNvPr id="7" name="CasellaDiTesto 6">
             <a:extLst>
               <a:ext uri="{FF2B5EF4-FFF2-40B4-BE49-F238E27FC236}">
-                <a16:creationId xmlns:a16="http://schemas.microsoft.com/office/drawing/2014/main" id="{3B278B73-0778-D492-1F6C-87666990069B}"/>
+                <a16:creationId xmlns:a16="http://schemas.microsoft.com/office/drawing/2014/main" id="{2EA21BB8-9B99-8A40-C4AF-7EDBE384A787}"/>
               </a:ext>
             </a:extLst>
           </p:cNvPr>
@@ -11803,149 +11810,266 @@
           </a:p>
         </p:txBody>
       </p:sp>
-      <p:sp>
-        <p:nvSpPr>
-          <p:cNvPr id="8" name="CasellaDiTesto 7">
-            <a:extLst>
-              <a:ext uri="{FF2B5EF4-FFF2-40B4-BE49-F238E27FC236}">
-                <a16:creationId xmlns:a16="http://schemas.microsoft.com/office/drawing/2014/main" id="{A50821A6-60A4-D071-9460-0357233E6C11}"/>
-              </a:ext>
-            </a:extLst>
-          </p:cNvPr>
-          <p:cNvSpPr txBox="1"/>
-          <p:nvPr/>
-        </p:nvSpPr>
-        <p:spPr>
-          <a:xfrm>
-            <a:off x="533399" y="728069"/>
-            <a:ext cx="11116884" cy="4693593"/>
-          </a:xfrm>
-          <a:prstGeom prst="rect">
-            <a:avLst/>
-          </a:prstGeom>
-          <a:noFill/>
-        </p:spPr>
-        <p:txBody>
-          <a:bodyPr wrap="square" rtlCol="0">
-            <a:spAutoFit/>
-          </a:bodyPr>
-          <a:lstStyle/>
-          <a:p>
-            <a:pPr algn="just">
-              <a:spcAft>
-                <a:spcPts val="600"/>
-              </a:spcAft>
-            </a:pPr>
-            <a:r>
-              <a:rPr lang="it-IT" sz="4000" b="1" dirty="0">
-                <a:solidFill>
-                  <a:srgbClr val="990000"/>
-                </a:solidFill>
-              </a:rPr>
-              <a:t>ODD CYCLE INEQUALITIES</a:t>
-            </a:r>
-          </a:p>
-          <a:p>
-            <a:pPr algn="just">
-              <a:spcAft>
-                <a:spcPts val="1200"/>
-              </a:spcAft>
-            </a:pPr>
-            <a:r>
-              <a:rPr lang="it-IT" sz="3200" b="1" dirty="0"/>
-              <a:t>Conseguenza: </a:t>
-            </a:r>
-            <a:r>
-              <a:rPr lang="it-IT" sz="3200" dirty="0"/>
-              <a:t>somme di x[i] a valore frazionario potrebbero violare le </a:t>
-            </a:r>
-            <a:r>
-              <a:rPr lang="it-IT" sz="3200" dirty="0" err="1"/>
-              <a:t>odd</a:t>
-            </a:r>
-            <a:r>
-              <a:rPr lang="it-IT" sz="3200" dirty="0"/>
-              <a:t> </a:t>
-            </a:r>
-            <a:r>
-              <a:rPr lang="it-IT" sz="3200" dirty="0" err="1"/>
-              <a:t>cycle</a:t>
-            </a:r>
-            <a:r>
-              <a:rPr lang="it-IT" sz="3200" dirty="0"/>
-              <a:t> </a:t>
-            </a:r>
-            <a:r>
-              <a:rPr lang="it-IT" sz="3200" dirty="0" err="1"/>
-              <a:t>inequalities</a:t>
-            </a:r>
-            <a:r>
-              <a:rPr lang="it-IT" sz="3200" dirty="0"/>
-              <a:t>.</a:t>
-            </a:r>
-          </a:p>
-          <a:p>
-            <a:pPr algn="just">
-              <a:spcAft>
-                <a:spcPts val="1200"/>
-              </a:spcAft>
-            </a:pPr>
-            <a:endParaRPr lang="it-IT" sz="3200" dirty="0"/>
-          </a:p>
-          <a:p>
-            <a:pPr algn="just">
-              <a:spcAft>
-                <a:spcPts val="1200"/>
-              </a:spcAft>
-            </a:pPr>
-            <a:r>
-              <a:rPr lang="it-IT" sz="3200" b="1" dirty="0"/>
-              <a:t>Applicazione: </a:t>
-            </a:r>
-            <a:r>
-              <a:rPr lang="it-IT" sz="3200" dirty="0"/>
-              <a:t>si potrebbe aggiungere un vincolo in più al modello di PL per ogni </a:t>
-            </a:r>
-            <a:r>
-              <a:rPr lang="it-IT" sz="3200" dirty="0" err="1"/>
-              <a:t>odd</a:t>
-            </a:r>
-            <a:r>
-              <a:rPr lang="it-IT" sz="3200" dirty="0"/>
-              <a:t> </a:t>
-            </a:r>
-            <a:r>
-              <a:rPr lang="it-IT" sz="3200" dirty="0" err="1"/>
-              <a:t>cycle</a:t>
-            </a:r>
-            <a:r>
-              <a:rPr lang="it-IT" sz="3200" dirty="0"/>
-              <a:t> </a:t>
-            </a:r>
-            <a:r>
-              <a:rPr lang="it-IT" sz="3200" dirty="0" err="1"/>
-              <a:t>inequality</a:t>
-            </a:r>
-            <a:r>
-              <a:rPr lang="it-IT" sz="3200" dirty="0"/>
-              <a:t> che deriva da un ciclo di lunghezza dispari.</a:t>
-            </a:r>
-            <a:endParaRPr lang="it-IT" sz="3200" b="1" dirty="0"/>
-          </a:p>
-          <a:p>
-            <a:pPr algn="just">
-              <a:spcAft>
-                <a:spcPts val="1200"/>
-              </a:spcAft>
-            </a:pPr>
-            <a:endParaRPr lang="it-IT" sz="3200" dirty="0"/>
-          </a:p>
-        </p:txBody>
-      </p:sp>
+      <mc:AlternateContent xmlns:mc="http://schemas.openxmlformats.org/markup-compatibility/2006">
+        <mc:Choice xmlns:a14="http://schemas.microsoft.com/office/drawing/2010/main" Requires="a14">
+          <p:sp>
+            <p:nvSpPr>
+              <p:cNvPr id="8" name="CasellaDiTesto 7">
+                <a:extLst>
+                  <a:ext uri="{FF2B5EF4-FFF2-40B4-BE49-F238E27FC236}">
+                    <a16:creationId xmlns:a16="http://schemas.microsoft.com/office/drawing/2014/main" id="{503AB59C-3B02-60BB-0756-BB9E636A5238}"/>
+                  </a:ext>
+                </a:extLst>
+              </p:cNvPr>
+              <p:cNvSpPr txBox="1"/>
+              <p:nvPr/>
+            </p:nvSpPr>
+            <p:spPr>
+              <a:xfrm>
+                <a:off x="533399" y="728069"/>
+                <a:ext cx="11116884" cy="4693593"/>
+              </a:xfrm>
+              <a:prstGeom prst="rect">
+                <a:avLst/>
+              </a:prstGeom>
+              <a:noFill/>
+            </p:spPr>
+            <p:txBody>
+              <a:bodyPr wrap="square" rtlCol="0">
+                <a:spAutoFit/>
+              </a:bodyPr>
+              <a:lstStyle/>
+              <a:p>
+                <a:pPr algn="just">
+                  <a:spcAft>
+                    <a:spcPts val="600"/>
+                  </a:spcAft>
+                </a:pPr>
+                <a:r>
+                  <a:rPr lang="it-IT" sz="4000" b="1" dirty="0">
+                    <a:solidFill>
+                      <a:srgbClr val="990000"/>
+                    </a:solidFill>
+                  </a:rPr>
+                  <a:t>ODD CYCLE INEQUALITIES</a:t>
+                </a:r>
+              </a:p>
+              <a:p>
+                <a:pPr algn="just">
+                  <a:spcAft>
+                    <a:spcPts val="1200"/>
+                  </a:spcAft>
+                </a:pPr>
+                <a:r>
+                  <a:rPr lang="it-IT" sz="3200" b="1" dirty="0"/>
+                  <a:t>Conseguenza: </a:t>
+                </a:r>
+                <a:r>
+                  <a:rPr lang="it-IT" sz="3200" dirty="0"/>
+                  <a:t>dato un ciclo C di lunghezza 2k+1</a:t>
+                </a:r>
+              </a:p>
+              <a:p>
+                <a:pPr algn="ctr">
+                  <a:spcAft>
+                    <a:spcPts val="1200"/>
+                  </a:spcAft>
+                </a:pPr>
+                <a:r>
+                  <a:rPr lang="it-IT" sz="3200" dirty="0"/>
+                  <a:t> </a:t>
+                </a:r>
+                <a14:m>
+                  <m:oMath xmlns:m="http://schemas.openxmlformats.org/officeDocument/2006/math">
+                    <m:nary>
+                      <m:naryPr>
+                        <m:chr m:val="∑"/>
+                        <m:supHide m:val="on"/>
+                        <m:ctrlPr>
+                          <a:rPr lang="it-IT" sz="3200" smtClean="0"/>
+                        </m:ctrlPr>
+                      </m:naryPr>
+                      <m:sub>
+                        <m:r>
+                          <m:rPr>
+                            <m:sty m:val="p"/>
+                            <m:brk m:alnAt="23"/>
+                          </m:rPr>
+                          <a:rPr lang="it-IT" sz="3200" b="0" i="0" smtClean="0"/>
+                          <m:t>i</m:t>
+                        </m:r>
+                        <m:r>
+                          <a:rPr lang="it-IT" sz="3200" b="0" i="0" smtClean="0"/>
+                          <m:t> </m:t>
+                        </m:r>
+                        <m:r>
+                          <a:rPr lang="it-IT" sz="3200" i="0" smtClean="0"/>
+                          <m:t>∈</m:t>
+                        </m:r>
+                        <m:r>
+                          <m:rPr>
+                            <m:sty m:val="p"/>
+                          </m:rPr>
+                          <a:rPr lang="it-IT" sz="3200" b="0" i="0" smtClean="0"/>
+                          <m:t>C</m:t>
+                        </m:r>
+                      </m:sub>
+                      <m:sup/>
+                      <m:e>
+                        <m:r>
+                          <m:rPr>
+                            <m:sty m:val="p"/>
+                          </m:rPr>
+                          <a:rPr lang="it-IT" sz="3200" b="0" i="0" smtClean="0"/>
+                          <m:t>x</m:t>
+                        </m:r>
+                        <m:r>
+                          <a:rPr lang="it-IT" sz="3200" b="0" i="0" smtClean="0"/>
+                          <m:t>[</m:t>
+                        </m:r>
+                        <m:r>
+                          <m:rPr>
+                            <m:sty m:val="p"/>
+                          </m:rPr>
+                          <a:rPr lang="it-IT" sz="3200" b="0" i="0" smtClean="0"/>
+                          <m:t>i</m:t>
+                        </m:r>
+                        <m:r>
+                          <a:rPr lang="it-IT" sz="3200" b="0" i="0" smtClean="0"/>
+                          <m:t>]</m:t>
+                        </m:r>
+                      </m:e>
+                    </m:nary>
+                  </m:oMath>
+                </a14:m>
+                <a:r>
+                  <a:rPr lang="it-IT" sz="3200" dirty="0"/>
+                  <a:t> </a:t>
+                </a:r>
+                <a14:m>
+                  <m:oMath xmlns:m="http://schemas.openxmlformats.org/officeDocument/2006/math">
+                    <m:r>
+                      <a:rPr lang="it-IT" sz="3200" i="1" dirty="0" smtClean="0">
+                        <a:latin typeface="Cambria Math" panose="02040503050406030204" pitchFamily="18" charset="0"/>
+                        <a:ea typeface="Cambria Math" panose="02040503050406030204" pitchFamily="18" charset="0"/>
+                      </a:rPr>
+                      <m:t>≥</m:t>
+                    </m:r>
+                  </m:oMath>
+                </a14:m>
+                <a:r>
+                  <a:rPr lang="it-IT" sz="3200" dirty="0"/>
+                  <a:t> k +1</a:t>
+                </a:r>
+              </a:p>
+              <a:p>
+                <a:pPr algn="ctr">
+                  <a:spcAft>
+                    <a:spcPts val="1200"/>
+                  </a:spcAft>
+                </a:pPr>
+                <a:endParaRPr lang="it-IT" sz="3200" dirty="0"/>
+              </a:p>
+              <a:p>
+                <a:pPr algn="just">
+                  <a:spcAft>
+                    <a:spcPts val="1200"/>
+                  </a:spcAft>
+                </a:pPr>
+                <a:r>
+                  <a:rPr lang="it-IT" sz="3200" b="1" dirty="0"/>
+                  <a:t>Considerazione: </a:t>
+                </a:r>
+                <a:r>
+                  <a:rPr lang="it-IT" sz="3200" dirty="0"/>
+                  <a:t>nel modello di PLI la x[i] relativa al vertice i vale 1 se quel vertice è stato inserito nella cover. Nel modello rilassato la x[i] può assumere valori frazionari e </a:t>
+                </a:r>
+                <a:r>
+                  <a:rPr lang="it-IT" sz="3200" b="1" dirty="0"/>
+                  <a:t>potrebbero essere violate </a:t>
+                </a:r>
+                <a:r>
+                  <a:rPr lang="it-IT" sz="3200" dirty="0"/>
+                  <a:t>le </a:t>
+                </a:r>
+                <a:r>
+                  <a:rPr lang="it-IT" sz="3200" dirty="0" err="1"/>
+                  <a:t>odd</a:t>
+                </a:r>
+                <a:r>
+                  <a:rPr lang="it-IT" sz="3200" dirty="0"/>
+                  <a:t> </a:t>
+                </a:r>
+                <a:r>
+                  <a:rPr lang="it-IT" sz="3200" dirty="0" err="1"/>
+                  <a:t>cycle</a:t>
+                </a:r>
+                <a:r>
+                  <a:rPr lang="it-IT" sz="3200" dirty="0"/>
+                  <a:t> </a:t>
+                </a:r>
+                <a:r>
+                  <a:rPr lang="it-IT" sz="3200" dirty="0" err="1"/>
+                  <a:t>inequalities</a:t>
+                </a:r>
+                <a:r>
+                  <a:rPr lang="it-IT" sz="3200" dirty="0"/>
+                  <a:t>.</a:t>
+                </a:r>
+                <a:endParaRPr lang="it-IT" sz="3200" b="1" dirty="0"/>
+              </a:p>
+            </p:txBody>
+          </p:sp>
+        </mc:Choice>
+        <mc:Fallback>
+          <p:sp>
+            <p:nvSpPr>
+              <p:cNvPr id="8" name="CasellaDiTesto 7">
+                <a:extLst>
+                  <a:ext uri="{FF2B5EF4-FFF2-40B4-BE49-F238E27FC236}">
+                    <a16:creationId xmlns:a16="http://schemas.microsoft.com/office/drawing/2014/main" id="{503AB59C-3B02-60BB-0756-BB9E636A5238}"/>
+                  </a:ext>
+                </a:extLst>
+              </p:cNvPr>
+              <p:cNvSpPr txBox="1">
+                <a:spLocks noRot="1" noChangeAspect="1" noMove="1" noResize="1" noEditPoints="1" noAdjustHandles="1" noChangeArrowheads="1" noChangeShapeType="1" noTextEdit="1"/>
+              </p:cNvSpPr>
+              <p:nvPr/>
+            </p:nvSpPr>
+            <p:spPr>
+              <a:xfrm>
+                <a:off x="533399" y="728069"/>
+                <a:ext cx="11116884" cy="4693593"/>
+              </a:xfrm>
+              <a:prstGeom prst="rect">
+                <a:avLst/>
+              </a:prstGeom>
+              <a:blipFill>
+                <a:blip r:embed="rId2"/>
+                <a:stretch>
+                  <a:fillRect l="-1919" t="-2338" r="-1371" b="-3377"/>
+                </a:stretch>
+              </a:blipFill>
+            </p:spPr>
+            <p:txBody>
+              <a:bodyPr/>
+              <a:lstStyle/>
+              <a:p>
+                <a:r>
+                  <a:rPr lang="it-IT">
+                    <a:noFill/>
+                  </a:rPr>
+                  <a:t> </a:t>
+                </a:r>
+              </a:p>
+            </p:txBody>
+          </p:sp>
+        </mc:Fallback>
+      </mc:AlternateContent>
     </p:spTree>
     <p:extLst>
       <p:ext uri="{BB962C8B-B14F-4D97-AF65-F5344CB8AC3E}">
-        <p14:creationId xmlns:p14="http://schemas.microsoft.com/office/powerpoint/2010/main" val="1229577184"/>
+        <p14:creationId xmlns:p14="http://schemas.microsoft.com/office/powerpoint/2010/main" val="2836330814"/>
       </p:ext>
     </p:extLst>
   </p:cSld>
@@ -11975,7 +12099,7 @@
         <p:cNvPr id="1" name="">
           <a:extLst>
             <a:ext uri="{FF2B5EF4-FFF2-40B4-BE49-F238E27FC236}">
-              <a16:creationId xmlns:a16="http://schemas.microsoft.com/office/drawing/2014/main" id="{72230790-CA9E-46C8-B79E-2C880476D85E}"/>
+              <a16:creationId xmlns:a16="http://schemas.microsoft.com/office/drawing/2014/main" id="{B94DB9C7-C12C-FB9E-BD5B-E6E1F6E72AC8}"/>
             </a:ext>
           </a:extLst>
         </p:cNvPr>
@@ -11995,7 +12119,7 @@
           <p:cNvPr id="5" name="Rettangolo 4">
             <a:extLst>
               <a:ext uri="{FF2B5EF4-FFF2-40B4-BE49-F238E27FC236}">
-                <a16:creationId xmlns:a16="http://schemas.microsoft.com/office/drawing/2014/main" id="{51A564E7-D61A-3689-0E67-C7CE0AADE608}"/>
+                <a16:creationId xmlns:a16="http://schemas.microsoft.com/office/drawing/2014/main" id="{80DE0A1C-D9FA-6552-EB65-8DB2236EF185}"/>
               </a:ext>
             </a:extLst>
           </p:cNvPr>
@@ -12049,7 +12173,7 @@
           <p:cNvPr id="6" name="CasellaDiTesto 5">
             <a:extLst>
               <a:ext uri="{FF2B5EF4-FFF2-40B4-BE49-F238E27FC236}">
-                <a16:creationId xmlns:a16="http://schemas.microsoft.com/office/drawing/2014/main" id="{8305053A-FB04-3D98-B7E3-A6725328FDDB}"/>
+                <a16:creationId xmlns:a16="http://schemas.microsoft.com/office/drawing/2014/main" id="{069437A2-D929-025B-6C2E-6E6BFA10D4EC}"/>
               </a:ext>
             </a:extLst>
           </p:cNvPr>
@@ -12089,7 +12213,7 @@
           <p:cNvPr id="7" name="CasellaDiTesto 6">
             <a:extLst>
               <a:ext uri="{FF2B5EF4-FFF2-40B4-BE49-F238E27FC236}">
-                <a16:creationId xmlns:a16="http://schemas.microsoft.com/office/drawing/2014/main" id="{CFA4171D-448C-DEF1-81DC-A8E37FFA7899}"/>
+                <a16:creationId xmlns:a16="http://schemas.microsoft.com/office/drawing/2014/main" id="{3B278B73-0778-D492-1F6C-87666990069B}"/>
               </a:ext>
             </a:extLst>
           </p:cNvPr>
@@ -12124,124 +12248,216 @@
           </a:p>
         </p:txBody>
       </p:sp>
-      <p:sp>
-        <p:nvSpPr>
-          <p:cNvPr id="8" name="CasellaDiTesto 7">
-            <a:extLst>
-              <a:ext uri="{FF2B5EF4-FFF2-40B4-BE49-F238E27FC236}">
-                <a16:creationId xmlns:a16="http://schemas.microsoft.com/office/drawing/2014/main" id="{80316673-81A7-D354-1165-75AC074028F5}"/>
-              </a:ext>
-            </a:extLst>
-          </p:cNvPr>
-          <p:cNvSpPr txBox="1"/>
-          <p:nvPr/>
-        </p:nvSpPr>
-        <p:spPr>
-          <a:xfrm>
-            <a:off x="533399" y="728069"/>
-            <a:ext cx="11116884" cy="4047262"/>
-          </a:xfrm>
-          <a:prstGeom prst="rect">
-            <a:avLst/>
-          </a:prstGeom>
-          <a:noFill/>
-        </p:spPr>
-        <p:txBody>
-          <a:bodyPr wrap="square" rtlCol="0">
-            <a:spAutoFit/>
-          </a:bodyPr>
-          <a:lstStyle/>
-          <a:p>
-            <a:pPr algn="just">
-              <a:spcAft>
-                <a:spcPts val="600"/>
-              </a:spcAft>
-            </a:pPr>
-            <a:r>
-              <a:rPr lang="it-IT" sz="4000" b="1" dirty="0">
-                <a:solidFill>
-                  <a:srgbClr val="990000"/>
-                </a:solidFill>
-              </a:rPr>
-              <a:t>ODD CYCLE INEQUALITIES</a:t>
-            </a:r>
-          </a:p>
-          <a:p>
-            <a:pPr algn="just">
-              <a:spcAft>
-                <a:spcPts val="1200"/>
-              </a:spcAft>
-            </a:pPr>
-            <a:r>
-              <a:rPr lang="it-IT" sz="3200" b="1" dirty="0"/>
-              <a:t>Implementazione nel progetto: </a:t>
-            </a:r>
-            <a:r>
-              <a:rPr lang="it-IT" sz="3200" dirty="0"/>
-              <a:t>ci si è concentrati solo sui cicli dispari di lunghezza minore possibile (triangoli).</a:t>
-            </a:r>
-          </a:p>
-          <a:p>
-            <a:pPr algn="just">
-              <a:spcAft>
-                <a:spcPts val="1200"/>
-              </a:spcAft>
-            </a:pPr>
-            <a:endParaRPr lang="it-IT" sz="3200" dirty="0"/>
-          </a:p>
-          <a:p>
-            <a:pPr algn="just">
-              <a:spcAft>
-                <a:spcPts val="1200"/>
-              </a:spcAft>
-            </a:pPr>
-            <a:r>
-              <a:rPr lang="it-IT" sz="3200" b="1" dirty="0"/>
-              <a:t>Utilizzo: </a:t>
-            </a:r>
-            <a:r>
-              <a:rPr lang="it-IT" sz="3200" dirty="0"/>
-              <a:t>dato che il numero di vertici del grafo non è noto a priori, si preferisce inserire gruppi di </a:t>
-            </a:r>
-            <a:r>
-              <a:rPr lang="it-IT" sz="3200" dirty="0" err="1"/>
-              <a:t>odd</a:t>
-            </a:r>
-            <a:r>
-              <a:rPr lang="it-IT" sz="3200" dirty="0"/>
-              <a:t> </a:t>
-            </a:r>
-            <a:r>
-              <a:rPr lang="it-IT" sz="3200" dirty="0" err="1"/>
-              <a:t>cycle</a:t>
-            </a:r>
-            <a:r>
-              <a:rPr lang="it-IT" sz="3200" dirty="0"/>
-              <a:t> </a:t>
-            </a:r>
-            <a:r>
-              <a:rPr lang="it-IT" sz="3200" dirty="0" err="1"/>
-              <a:t>inequalities</a:t>
-            </a:r>
-            <a:r>
-              <a:rPr lang="it-IT" sz="3200" dirty="0"/>
-              <a:t> applicando uno schema simile al cutting </a:t>
-            </a:r>
-            <a:r>
-              <a:rPr lang="it-IT" sz="3200" dirty="0" err="1"/>
-              <a:t>plane</a:t>
-            </a:r>
-            <a:r>
-              <a:rPr lang="it-IT" sz="3200" dirty="0"/>
-              <a:t>.</a:t>
-            </a:r>
-          </a:p>
-        </p:txBody>
-      </p:sp>
+      <mc:AlternateContent xmlns:mc="http://schemas.openxmlformats.org/markup-compatibility/2006">
+        <mc:Choice xmlns:a14="http://schemas.microsoft.com/office/drawing/2010/main" Requires="a14">
+          <p:sp>
+            <p:nvSpPr>
+              <p:cNvPr id="8" name="CasellaDiTesto 7">
+                <a:extLst>
+                  <a:ext uri="{FF2B5EF4-FFF2-40B4-BE49-F238E27FC236}">
+                    <a16:creationId xmlns:a16="http://schemas.microsoft.com/office/drawing/2014/main" id="{A50821A6-60A4-D071-9460-0357233E6C11}"/>
+                  </a:ext>
+                </a:extLst>
+              </p:cNvPr>
+              <p:cNvSpPr txBox="1"/>
+              <p:nvPr/>
+            </p:nvSpPr>
+            <p:spPr>
+              <a:xfrm>
+                <a:off x="533399" y="728069"/>
+                <a:ext cx="11116884" cy="5339923"/>
+              </a:xfrm>
+              <a:prstGeom prst="rect">
+                <a:avLst/>
+              </a:prstGeom>
+              <a:noFill/>
+            </p:spPr>
+            <p:txBody>
+              <a:bodyPr wrap="square" rtlCol="0">
+                <a:spAutoFit/>
+              </a:bodyPr>
+              <a:lstStyle/>
+              <a:p>
+                <a:pPr algn="just">
+                  <a:spcAft>
+                    <a:spcPts val="600"/>
+                  </a:spcAft>
+                </a:pPr>
+                <a:r>
+                  <a:rPr lang="it-IT" sz="4000" b="1" dirty="0">
+                    <a:solidFill>
+                      <a:srgbClr val="990000"/>
+                    </a:solidFill>
+                  </a:rPr>
+                  <a:t>ODD CYCLE INEQUALITIES</a:t>
+                </a:r>
+              </a:p>
+              <a:p>
+                <a:pPr algn="just">
+                  <a:spcAft>
+                    <a:spcPts val="1200"/>
+                  </a:spcAft>
+                </a:pPr>
+                <a:r>
+                  <a:rPr lang="it-IT" sz="3200" b="1" dirty="0"/>
+                  <a:t>Applicazione: </a:t>
+                </a:r>
+                <a:r>
+                  <a:rPr lang="it-IT" sz="3200" dirty="0"/>
+                  <a:t>si potrebbe aggiungere un vincolo in più al modello di PL per ogni </a:t>
+                </a:r>
+                <a:r>
+                  <a:rPr lang="it-IT" sz="3200" dirty="0" err="1"/>
+                  <a:t>odd</a:t>
+                </a:r>
+                <a:r>
+                  <a:rPr lang="it-IT" sz="3200" dirty="0"/>
+                  <a:t> </a:t>
+                </a:r>
+                <a:r>
+                  <a:rPr lang="it-IT" sz="3200" dirty="0" err="1"/>
+                  <a:t>cycle</a:t>
+                </a:r>
+                <a:r>
+                  <a:rPr lang="it-IT" sz="3200" dirty="0"/>
+                  <a:t> </a:t>
+                </a:r>
+                <a:r>
+                  <a:rPr lang="it-IT" sz="3200" dirty="0" err="1"/>
+                  <a:t>inequality</a:t>
+                </a:r>
+                <a:r>
+                  <a:rPr lang="it-IT" sz="3200" dirty="0"/>
+                  <a:t> che deriva da un ciclo di lunghezza dispari.</a:t>
+                </a:r>
+              </a:p>
+              <a:p>
+                <a:pPr algn="just">
+                  <a:spcAft>
+                    <a:spcPts val="1200"/>
+                  </a:spcAft>
+                </a:pPr>
+                <a:endParaRPr lang="it-IT" sz="3200" b="1" dirty="0"/>
+              </a:p>
+              <a:p>
+                <a:pPr algn="just">
+                  <a:spcAft>
+                    <a:spcPts val="1200"/>
+                  </a:spcAft>
+                </a:pPr>
+                <a:r>
+                  <a:rPr lang="it-IT" sz="3200" b="1" dirty="0"/>
+                  <a:t>Implementazione: </a:t>
+                </a:r>
+                <a:r>
+                  <a:rPr lang="it-IT" sz="3200" dirty="0"/>
+                  <a:t>ci si è concentrati solo sui cicli dispari di lunghezza minore possibile (triangoli).</a:t>
+                </a:r>
+              </a:p>
+              <a:p>
+                <a:pPr algn="just">
+                  <a:spcAft>
+                    <a:spcPts val="1200"/>
+                  </a:spcAft>
+                </a:pPr>
+                <a14:m>
+                  <m:oMath xmlns:m="http://schemas.openxmlformats.org/officeDocument/2006/math">
+                    <m:r>
+                      <a:rPr lang="it-IT" sz="3200" b="0" i="1" smtClean="0">
+                        <a:latin typeface="Cambria Math" panose="02040503050406030204" pitchFamily="18" charset="0"/>
+                        <a:ea typeface="Cambria Math" panose="02040503050406030204" pitchFamily="18" charset="0"/>
+                      </a:rPr>
+                      <m:t>∀</m:t>
+                    </m:r>
+                  </m:oMath>
+                </a14:m>
+                <a:r>
+                  <a:rPr lang="it-IT" sz="3200" dirty="0" err="1"/>
+                  <a:t>u,v,w</a:t>
+                </a:r>
+                <a:r>
+                  <a:rPr lang="it-IT" sz="3200" dirty="0"/>
+                  <a:t> vertici di un triangolo, deve valere:</a:t>
+                </a:r>
+              </a:p>
+              <a:p>
+                <a:pPr algn="ctr">
+                  <a:spcAft>
+                    <a:spcPts val="1200"/>
+                  </a:spcAft>
+                </a:pPr>
+                <a:r>
+                  <a:rPr lang="it-IT" sz="3200" dirty="0"/>
+                  <a:t>X[u] + x[v] + x[w] </a:t>
+                </a:r>
+                <a14:m>
+                  <m:oMath xmlns:m="http://schemas.openxmlformats.org/officeDocument/2006/math">
+                    <m:r>
+                      <a:rPr lang="it-IT" sz="3200" b="0" i="1" smtClean="0">
+                        <a:latin typeface="Cambria Math" panose="02040503050406030204" pitchFamily="18" charset="0"/>
+                        <a:ea typeface="Cambria Math" panose="02040503050406030204" pitchFamily="18" charset="0"/>
+                      </a:rPr>
+                      <m:t>≥</m:t>
+                    </m:r>
+                  </m:oMath>
+                </a14:m>
+                <a:r>
+                  <a:rPr lang="it-IT" sz="3200" dirty="0"/>
+                  <a:t> 2</a:t>
+                </a:r>
+              </a:p>
+            </p:txBody>
+          </p:sp>
+        </mc:Choice>
+        <mc:Fallback>
+          <p:sp>
+            <p:nvSpPr>
+              <p:cNvPr id="8" name="CasellaDiTesto 7">
+                <a:extLst>
+                  <a:ext uri="{FF2B5EF4-FFF2-40B4-BE49-F238E27FC236}">
+                    <a16:creationId xmlns:a16="http://schemas.microsoft.com/office/drawing/2014/main" id="{A50821A6-60A4-D071-9460-0357233E6C11}"/>
+                  </a:ext>
+                </a:extLst>
+              </p:cNvPr>
+              <p:cNvSpPr txBox="1">
+                <a:spLocks noRot="1" noChangeAspect="1" noMove="1" noResize="1" noEditPoints="1" noAdjustHandles="1" noChangeArrowheads="1" noChangeShapeType="1" noTextEdit="1"/>
+              </p:cNvSpPr>
+              <p:nvPr/>
+            </p:nvSpPr>
+            <p:spPr>
+              <a:xfrm>
+                <a:off x="533399" y="728069"/>
+                <a:ext cx="11116884" cy="5339923"/>
+              </a:xfrm>
+              <a:prstGeom prst="rect">
+                <a:avLst/>
+              </a:prstGeom>
+              <a:blipFill>
+                <a:blip r:embed="rId2"/>
+                <a:stretch>
+                  <a:fillRect l="-1919" t="-2055" r="-1371" b="-2854"/>
+                </a:stretch>
+              </a:blipFill>
+            </p:spPr>
+            <p:txBody>
+              <a:bodyPr/>
+              <a:lstStyle/>
+              <a:p>
+                <a:r>
+                  <a:rPr lang="it-IT">
+                    <a:noFill/>
+                  </a:rPr>
+                  <a:t> </a:t>
+                </a:r>
+              </a:p>
+            </p:txBody>
+          </p:sp>
+        </mc:Fallback>
+      </mc:AlternateContent>
     </p:spTree>
     <p:extLst>
       <p:ext uri="{BB962C8B-B14F-4D97-AF65-F5344CB8AC3E}">
-        <p14:creationId xmlns:p14="http://schemas.microsoft.com/office/powerpoint/2010/main" val="932637983"/>
+        <p14:creationId xmlns:p14="http://schemas.microsoft.com/office/powerpoint/2010/main" val="1229577184"/>
       </p:ext>
     </p:extLst>
   </p:cSld>
@@ -25396,7 +25612,7 @@
             </a:pPr>
             <a:r>
               <a:rPr lang="it-IT" sz="2800" dirty="0"/>
-              <a:t>Se è si sta considerando un rapporto grado massimo/grado medio di 1 (classe 0) allora si usa la primitiva che genera un grafo di n nodi, tutti con stesso grado, pari al valore medio trovato. Da notare l’arrotondamento e la modifica del grado se si viola l’</a:t>
+              <a:t>Se è si sta considerando un rapporto grado massimo/grado medio di 1 (classe 0) allora si usa la primitiva che genera un grafo di n vertici, tutti con stesso grado, pari al valore medio trovato. Da notare l’arrotondamento e la modifica del grado se si viola l’</a:t>
             </a:r>
             <a:r>
               <a:rPr lang="it-IT" sz="2800" dirty="0" err="1"/>
@@ -26561,8 +26777,8 @@
           </a:p>
         </p:txBody>
       </p:sp>
-      <mc:AlternateContent xmlns:mc="http://schemas.openxmlformats.org/markup-compatibility/2006" xmlns:a14="http://schemas.microsoft.com/office/drawing/2010/main">
-        <mc:Choice Requires="a14">
+      <mc:AlternateContent xmlns:mc="http://schemas.openxmlformats.org/markup-compatibility/2006">
+        <mc:Choice xmlns:a14="http://schemas.microsoft.com/office/drawing/2010/main" Requires="a14">
           <p:sp>
             <p:nvSpPr>
               <p:cNvPr id="8" name="CasellaDiTesto 7">
@@ -26773,6 +26989,18 @@
                 <a14:m>
                   <m:oMath xmlns:m="http://schemas.openxmlformats.org/officeDocument/2006/math">
                     <m:r>
+                      <a:rPr lang="it-IT" sz="2800" i="1" dirty="0">
+                        <a:latin typeface="Cambria Math" panose="02040503050406030204" pitchFamily="18" charset="0"/>
+                      </a:rPr>
+                      <m:t>𝜇</m:t>
+                    </m:r>
+                    <m:r>
+                      <a:rPr lang="it-IT" sz="2800" i="1" dirty="0">
+                        <a:latin typeface="Cambria Math" panose="02040503050406030204" pitchFamily="18" charset="0"/>
+                      </a:rPr>
+                      <m:t> </m:t>
+                    </m:r>
+                    <m:r>
                       <a:rPr lang="it-IT" sz="2800" dirty="0" smtClean="0">
                         <a:latin typeface="Cambria Math" panose="02040503050406030204" pitchFamily="18" charset="0"/>
                       </a:rPr>
@@ -26782,13 +27010,24 @@
                 </a14:m>
                 <a:r>
                   <a:rPr lang="it-IT" sz="2800" dirty="0"/>
-                  <a:t> 0.14</a:t>
+                  <a:t> 0.14 </a:t>
                 </a:r>
+                <a14:m>
+                  <m:oMath xmlns:m="http://schemas.openxmlformats.org/officeDocument/2006/math">
+                    <m:r>
+                      <a:rPr lang="it-IT" sz="2800" i="1" dirty="0">
+                        <a:latin typeface="Cambria Math" panose="02040503050406030204" pitchFamily="18" charset="0"/>
+                      </a:rPr>
+                      <m:t>𝜇</m:t>
+                    </m:r>
+                  </m:oMath>
+                </a14:m>
+                <a:endParaRPr lang="it-IT" sz="2800" dirty="0"/>
               </a:p>
             </p:txBody>
           </p:sp>
         </mc:Choice>
-        <mc:Fallback xmlns="">
+        <mc:Fallback>
           <p:sp>
             <p:nvSpPr>
               <p:cNvPr id="8" name="CasellaDiTesto 7">
@@ -27318,8 +27557,8 @@
           </a:p>
         </p:txBody>
       </p:sp>
-      <mc:AlternateContent xmlns:mc="http://schemas.openxmlformats.org/markup-compatibility/2006" xmlns:a14="http://schemas.microsoft.com/office/drawing/2010/main">
-        <mc:Choice Requires="a14">
+      <mc:AlternateContent xmlns:mc="http://schemas.openxmlformats.org/markup-compatibility/2006">
+        <mc:Choice xmlns:a14="http://schemas.microsoft.com/office/drawing/2010/main" Requires="a14">
           <p:sp>
             <p:nvSpPr>
               <p:cNvPr id="8" name="CasellaDiTesto 7">
@@ -27427,13 +27666,13 @@
                 </a14:m>
                 <a:r>
                   <a:rPr lang="it-IT" sz="2800" dirty="0"/>
-                  <a:t> = 1 è stato ritenuto un valore coerente per evitare la formazione di pochissimi nodi con altissimo grado ma senza generare valori troppo simili a quelli di una normale.</a:t>
+                  <a:t> = 1 è stato ritenuto un valore coerente per evitare la formazione di pochissimi vertici con altissimo grado ma senza generare valori troppo simili a quelli di una normale.</a:t>
                 </a:r>
               </a:p>
             </p:txBody>
           </p:sp>
         </mc:Choice>
-        <mc:Fallback xmlns="">
+        <mc:Fallback>
           <p:sp>
             <p:nvSpPr>
               <p:cNvPr id="8" name="CasellaDiTesto 7">
@@ -28363,7 +28602,7 @@
             </a:pPr>
             <a:r>
               <a:rPr lang="it-IT" sz="2800" dirty="0"/>
-              <a:t>Genera un grafo dato il numero di nodi e la densità; usa la densità come probabilità per generare gli archi.</a:t>
+              <a:t>Genera un grafo dato il numero di vertici e la densità; usa la densità come probabilità per generare gli archi.</a:t>
             </a:r>
           </a:p>
           <a:p>
@@ -40691,7 +40930,7 @@
             </a:pPr>
             <a:r>
               <a:rPr lang="it-IT" sz="3200" dirty="0"/>
-              <a:t>Soffre eccessivamente le istanze con alta variabilità del peso dei nodi</a:t>
+              <a:t>Soffre eccessivamente le istanze con alta variabilità del peso dei vertici</a:t>
             </a:r>
             <a:endParaRPr lang="it-IT" sz="4000" b="1" dirty="0">
               <a:solidFill>

--- a/Presentazione_0386492.pptx
+++ b/Presentazione_0386492.pptx
@@ -11591,7 +11591,7 @@
             </a:r>
             <a:r>
               <a:rPr lang="it-IT" sz="3200" dirty="0"/>
-              <a:t>in un grafo G = (V, E), S è una cover solo se V / S è un set indipendente (non ammette coppie di nodi adiacenti). Inoltre, a partire da un ciclo di lunghezza dispari (2k+1) </a:t>
+              <a:t>in un grafo G = (V, E), S è una cover solo se V / S è un set indipendente (non ammette coppie di vertici adiacenti). Inoltre, a partire da un ciclo di lunghezza dispari (2k+1), </a:t>
             </a:r>
             <a:r>
               <a:rPr lang="it-IT" sz="3200" b="1" dirty="0"/>
@@ -11615,7 +11615,7 @@
             </a:r>
             <a:r>
               <a:rPr lang="it-IT" sz="3200" dirty="0"/>
-              <a:t>da un ciclo di 2k+1 nodi, massimo k possono formare un set indipendente, i restanti </a:t>
+              <a:t>da un ciclo di 2k+1 vertici, massimo k possono formare un set indipendente, i restanti </a:t>
             </a:r>
             <a:r>
               <a:rPr lang="it-IT" sz="3200" b="1" dirty="0"/>
@@ -11810,8 +11810,8 @@
           </a:p>
         </p:txBody>
       </p:sp>
-      <mc:AlternateContent xmlns:mc="http://schemas.openxmlformats.org/markup-compatibility/2006">
-        <mc:Choice xmlns:a14="http://schemas.microsoft.com/office/drawing/2010/main" Requires="a14">
+      <mc:AlternateContent xmlns:mc="http://schemas.openxmlformats.org/markup-compatibility/2006" xmlns:a14="http://schemas.microsoft.com/office/drawing/2010/main">
+        <mc:Choice Requires="a14">
           <p:sp>
             <p:nvSpPr>
               <p:cNvPr id="8" name="CasellaDiTesto 7">
@@ -11886,7 +11886,9 @@
                         <m:chr m:val="∑"/>
                         <m:supHide m:val="on"/>
                         <m:ctrlPr>
-                          <a:rPr lang="it-IT" sz="3200" smtClean="0"/>
+                          <a:rPr lang="it-IT" sz="3200" i="1" smtClean="0">
+                            <a:latin typeface="Cambria Math" panose="02040503050406030204" pitchFamily="18" charset="0"/>
+                          </a:rPr>
                         </m:ctrlPr>
                       </m:naryPr>
                       <m:sub>
@@ -11895,22 +11897,30 @@
                             <m:sty m:val="p"/>
                             <m:brk m:alnAt="23"/>
                           </m:rPr>
-                          <a:rPr lang="it-IT" sz="3200" b="0" i="0" smtClean="0"/>
+                          <a:rPr lang="it-IT" sz="3200" b="0" i="0" smtClean="0">
+                            <a:latin typeface="Cambria Math" panose="02040503050406030204" pitchFamily="18" charset="0"/>
+                          </a:rPr>
                           <m:t>i</m:t>
                         </m:r>
                         <m:r>
-                          <a:rPr lang="it-IT" sz="3200" b="0" i="0" smtClean="0"/>
+                          <a:rPr lang="it-IT" sz="3200" b="0" i="0" smtClean="0">
+                            <a:latin typeface="Cambria Math" panose="02040503050406030204" pitchFamily="18" charset="0"/>
+                          </a:rPr>
                           <m:t> </m:t>
                         </m:r>
                         <m:r>
-                          <a:rPr lang="it-IT" sz="3200" i="0" smtClean="0"/>
+                          <a:rPr lang="it-IT" sz="3200" i="0" smtClean="0">
+                            <a:latin typeface="Cambria Math" panose="02040503050406030204" pitchFamily="18" charset="0"/>
+                          </a:rPr>
                           <m:t>∈</m:t>
                         </m:r>
                         <m:r>
                           <m:rPr>
                             <m:sty m:val="p"/>
                           </m:rPr>
-                          <a:rPr lang="it-IT" sz="3200" b="0" i="0" smtClean="0"/>
+                          <a:rPr lang="it-IT" sz="3200" b="0" i="0" smtClean="0">
+                            <a:latin typeface="Cambria Math" panose="02040503050406030204" pitchFamily="18" charset="0"/>
+                          </a:rPr>
                           <m:t>C</m:t>
                         </m:r>
                       </m:sub>
@@ -11920,22 +11930,30 @@
                           <m:rPr>
                             <m:sty m:val="p"/>
                           </m:rPr>
-                          <a:rPr lang="it-IT" sz="3200" b="0" i="0" smtClean="0"/>
+                          <a:rPr lang="it-IT" sz="3200" b="0" i="0" smtClean="0">
+                            <a:latin typeface="Cambria Math" panose="02040503050406030204" pitchFamily="18" charset="0"/>
+                          </a:rPr>
                           <m:t>x</m:t>
                         </m:r>
                         <m:r>
-                          <a:rPr lang="it-IT" sz="3200" b="0" i="0" smtClean="0"/>
+                          <a:rPr lang="it-IT" sz="3200" b="0" i="0" smtClean="0">
+                            <a:latin typeface="Cambria Math" panose="02040503050406030204" pitchFamily="18" charset="0"/>
+                          </a:rPr>
                           <m:t>[</m:t>
                         </m:r>
                         <m:r>
                           <m:rPr>
                             <m:sty m:val="p"/>
                           </m:rPr>
-                          <a:rPr lang="it-IT" sz="3200" b="0" i="0" smtClean="0"/>
+                          <a:rPr lang="it-IT" sz="3200" b="0" i="0" smtClean="0">
+                            <a:latin typeface="Cambria Math" panose="02040503050406030204" pitchFamily="18" charset="0"/>
+                          </a:rPr>
                           <m:t>i</m:t>
                         </m:r>
                         <m:r>
-                          <a:rPr lang="it-IT" sz="3200" b="0" i="0" smtClean="0"/>
+                          <a:rPr lang="it-IT" sz="3200" b="0" i="0" smtClean="0">
+                            <a:latin typeface="Cambria Math" panose="02040503050406030204" pitchFamily="18" charset="0"/>
+                          </a:rPr>
                           <m:t>]</m:t>
                         </m:r>
                       </m:e>
@@ -12021,7 +12039,7 @@
             </p:txBody>
           </p:sp>
         </mc:Choice>
-        <mc:Fallback>
+        <mc:Fallback xmlns="">
           <p:sp>
             <p:nvSpPr>
               <p:cNvPr id="8" name="CasellaDiTesto 7">
@@ -12248,8 +12266,8 @@
           </a:p>
         </p:txBody>
       </p:sp>
-      <mc:AlternateContent xmlns:mc="http://schemas.openxmlformats.org/markup-compatibility/2006">
-        <mc:Choice xmlns:a14="http://schemas.microsoft.com/office/drawing/2010/main" Requires="a14">
+      <mc:AlternateContent xmlns:mc="http://schemas.openxmlformats.org/markup-compatibility/2006" xmlns:a14="http://schemas.microsoft.com/office/drawing/2010/main">
+        <mc:Choice Requires="a14">
           <p:sp>
             <p:nvSpPr>
               <p:cNvPr id="8" name="CasellaDiTesto 7">
@@ -12409,7 +12427,7 @@
             </p:txBody>
           </p:sp>
         </mc:Choice>
-        <mc:Fallback>
+        <mc:Fallback xmlns="">
           <p:sp>
             <p:nvSpPr>
               <p:cNvPr id="8" name="CasellaDiTesto 7">
@@ -26777,8 +26795,8 @@
           </a:p>
         </p:txBody>
       </p:sp>
-      <mc:AlternateContent xmlns:mc="http://schemas.openxmlformats.org/markup-compatibility/2006">
-        <mc:Choice xmlns:a14="http://schemas.microsoft.com/office/drawing/2010/main" Requires="a14">
+      <mc:AlternateContent xmlns:mc="http://schemas.openxmlformats.org/markup-compatibility/2006" xmlns:a14="http://schemas.microsoft.com/office/drawing/2010/main">
+        <mc:Choice Requires="a14">
           <p:sp>
             <p:nvSpPr>
               <p:cNvPr id="8" name="CasellaDiTesto 7">
@@ -27027,7 +27045,7 @@
             </p:txBody>
           </p:sp>
         </mc:Choice>
-        <mc:Fallback>
+        <mc:Fallback xmlns="">
           <p:sp>
             <p:nvSpPr>
               <p:cNvPr id="8" name="CasellaDiTesto 7">
@@ -27557,8 +27575,8 @@
           </a:p>
         </p:txBody>
       </p:sp>
-      <mc:AlternateContent xmlns:mc="http://schemas.openxmlformats.org/markup-compatibility/2006">
-        <mc:Choice xmlns:a14="http://schemas.microsoft.com/office/drawing/2010/main" Requires="a14">
+      <mc:AlternateContent xmlns:mc="http://schemas.openxmlformats.org/markup-compatibility/2006" xmlns:a14="http://schemas.microsoft.com/office/drawing/2010/main">
+        <mc:Choice Requires="a14">
           <p:sp>
             <p:nvSpPr>
               <p:cNvPr id="8" name="CasellaDiTesto 7">
@@ -27672,7 +27690,7 @@
             </p:txBody>
           </p:sp>
         </mc:Choice>
-        <mc:Fallback>
+        <mc:Fallback xmlns="">
           <p:sp>
             <p:nvSpPr>
               <p:cNvPr id="8" name="CasellaDiTesto 7">
